--- a/metro/metro-s07-listing-highlight.pptx
+++ b/metro/metro-s07-listing-highlight.pptx
@@ -3514,9 +3514,9 @@
                 <a:solidFill>
                   <a:srgbClr val="2D5BE3"/>
                 </a:solidFill>
-                <a:latin typeface="Space Grotesk"/>
-                <a:ea typeface="Space Grotesk"/>
-                <a:cs typeface="Space Grotesk"/>
+                <a:latin typeface="HK Grotesk"/>
+                <a:ea typeface="HK Grotesk"/>
+                <a:cs typeface="HK Grotesk"/>
               </a:rPr>
               <a:t>01</a:t>
             </a:r>
@@ -3549,9 +3549,9 @@
                 <a:solidFill>
                   <a:srgbClr val="FFFFFF"/>
                 </a:solidFill>
-                <a:latin typeface="Space Grotesk"/>
-                <a:ea typeface="Space Grotesk"/>
-                <a:cs typeface="Space Grotesk"/>
+                <a:latin typeface="HK Grotesk"/>
+                <a:ea typeface="HK Grotesk"/>
+                <a:cs typeface="HK Grotesk"/>
               </a:rPr>
               <a:t>Chef’s kitchen with a quartz waterfall island</a:t>
             </a:r>
@@ -3588,9 +3588,9 @@
                 <a:solidFill>
                   <a:srgbClr val="2D5BE3"/>
                 </a:solidFill>
-                <a:latin typeface="Space Grotesk"/>
-                <a:ea typeface="Space Grotesk"/>
-                <a:cs typeface="Space Grotesk"/>
+                <a:latin typeface="HK Grotesk"/>
+                <a:ea typeface="HK Grotesk"/>
+                <a:cs typeface="HK Grotesk"/>
               </a:rPr>
               <a:t>02</a:t>
             </a:r>
@@ -3623,9 +3623,9 @@
                 <a:solidFill>
                   <a:srgbClr val="FFFFFF"/>
                 </a:solidFill>
-                <a:latin typeface="Space Grotesk"/>
-                <a:ea typeface="Space Grotesk"/>
-                <a:cs typeface="Space Grotesk"/>
+                <a:latin typeface="HK Grotesk"/>
+                <a:ea typeface="HK Grotesk"/>
+                <a:cs typeface="HK Grotesk"/>
               </a:rPr>
               <a:t>Floor-to-ceiling glazing, skyline views</a:t>
             </a:r>
@@ -3662,9 +3662,9 @@
                 <a:solidFill>
                   <a:srgbClr val="2D5BE3"/>
                 </a:solidFill>
-                <a:latin typeface="Space Grotesk"/>
-                <a:ea typeface="Space Grotesk"/>
-                <a:cs typeface="Space Grotesk"/>
+                <a:latin typeface="HK Grotesk"/>
+                <a:ea typeface="HK Grotesk"/>
+                <a:cs typeface="HK Grotesk"/>
               </a:rPr>
               <a:t>03</a:t>
             </a:r>
@@ -3697,9 +3697,9 @@
                 <a:solidFill>
                   <a:srgbClr val="FFFFFF"/>
                 </a:solidFill>
-                <a:latin typeface="Space Grotesk"/>
-                <a:ea typeface="Space Grotesk"/>
-                <a:cs typeface="Space Grotesk"/>
+                <a:latin typeface="HK Grotesk"/>
+                <a:ea typeface="HK Grotesk"/>
+                <a:cs typeface="HK Grotesk"/>
               </a:rPr>
               <a:t>Private balcony and skyline terrace</a:t>
             </a:r>
@@ -3732,9 +3732,9 @@
                 <a:solidFill>
                   <a:srgbClr val="FFFFFF"/>
                 </a:solidFill>
-                <a:latin typeface="Space Grotesk"/>
-                <a:ea typeface="Space Grotesk"/>
-                <a:cs typeface="Space Grotesk"/>
+                <a:latin typeface="HK Grotesk"/>
+                <a:ea typeface="HK Grotesk"/>
+                <a:cs typeface="HK Grotesk"/>
               </a:rPr>
               <a:t>See all photos</a:t>
             </a:r>
@@ -3767,9 +3767,9 @@
                 <a:solidFill>
                   <a:srgbClr val="2D5BE3"/>
                 </a:solidFill>
-                <a:latin typeface="Space Grotesk"/>
-                <a:ea typeface="Space Grotesk"/>
-                <a:cs typeface="Space Grotesk"/>
+                <a:latin typeface="HK Grotesk"/>
+                <a:ea typeface="HK Grotesk"/>
+                <a:cs typeface="HK Grotesk"/>
               </a:rPr>
               <a:t>↗</a:t>
             </a:r>

--- a/metro/metro-s07-listing-highlight.pptx
+++ b/metro/metro-s07-listing-highlight.pptx
@@ -3140,7 +3140,7 @@
         </p:nvSpPr>
         <p:spPr>
           <a:xfrm>
-            <a:off x="762000" y="12727186"/>
+            <a:off x="762000" y="13009215"/>
             <a:ext cx="8763000" cy="9525"/>
           </a:xfrm>
           <a:prstGeom prst="rect">
@@ -3184,7 +3184,7 @@
         </p:nvSpPr>
         <p:spPr>
           <a:xfrm>
-            <a:off x="762000" y="13271897"/>
+            <a:off x="762000" y="13835955"/>
             <a:ext cx="8763000" cy="9525"/>
           </a:xfrm>
           <a:prstGeom prst="rect">
@@ -3228,7 +3228,7 @@
         </p:nvSpPr>
         <p:spPr>
           <a:xfrm>
-            <a:off x="762000" y="13816608"/>
+            <a:off x="762000" y="14662696"/>
             <a:ext cx="8763000" cy="9525"/>
           </a:xfrm>
           <a:prstGeom prst="rect">
@@ -3272,7 +3272,7 @@
         </p:nvSpPr>
         <p:spPr>
           <a:xfrm>
-            <a:off x="762000" y="15735300"/>
+            <a:off x="762000" y="15525750"/>
             <a:ext cx="8763000" cy="9525"/>
           </a:xfrm>
           <a:prstGeom prst="rect">
@@ -3360,8 +3360,8 @@
         </p:nvSpPr>
         <p:spPr>
           <a:xfrm>
-            <a:off x="762000" y="15735300"/>
-            <a:ext cx="9525" cy="647700"/>
+            <a:off x="762000" y="15525750"/>
+            <a:ext cx="9525" cy="857250"/>
           </a:xfrm>
           <a:prstGeom prst="rect">
             <a:avLst/>
@@ -3404,8 +3404,8 @@
         </p:nvSpPr>
         <p:spPr>
           <a:xfrm>
-            <a:off x="9515475" y="15735300"/>
-            <a:ext cx="9525" cy="647700"/>
+            <a:off x="9515475" y="15525750"/>
+            <a:ext cx="9525" cy="857250"/>
           </a:xfrm>
           <a:prstGeom prst="rect">
             <a:avLst/>
@@ -3448,7 +3448,7 @@
         </p:nvSpPr>
         <p:spPr>
           <a:xfrm>
-            <a:off x="1024416" y="16012004"/>
+            <a:off x="1081566" y="15907229"/>
             <a:ext cx="94293" cy="94292"/>
           </a:xfrm>
           <a:prstGeom prst="rect">
@@ -3492,8 +3492,8 @@
         </p:nvSpPr>
         <p:spPr>
           <a:xfrm>
-            <a:off x="762000" y="12344400"/>
-            <a:ext cx="754142" cy="230386"/>
+            <a:off x="762000" y="12401550"/>
+            <a:ext cx="1025366" cy="398115"/>
           </a:xfrm>
           <a:prstGeom prst="rect">
             <a:avLst/>
@@ -3510,13 +3510,13 @@
               </a:lnSpc>
             </a:pPr>
             <a:r>
-              <a:rPr sz="1650" i="0" b="1">
+              <a:rPr sz="2850" i="0" b="1">
                 <a:solidFill>
                   <a:srgbClr val="2D5BE3"/>
                 </a:solidFill>
-                <a:latin typeface="HK Grotesk"/>
-                <a:ea typeface="HK Grotesk"/>
-                <a:cs typeface="HK Grotesk"/>
+                <a:latin typeface="Space Grotesk"/>
+                <a:ea typeface="Space Grotesk"/>
+                <a:cs typeface="Space Grotesk"/>
               </a:rPr>
               <a:t>01</a:t>
             </a:r>
@@ -3531,8 +3531,8 @@
         </p:nvSpPr>
         <p:spPr>
           <a:xfrm>
-            <a:off x="1166664" y="12344400"/>
-            <a:ext cx="5626179" cy="200025"/>
+            <a:off x="1336179" y="12401550"/>
+            <a:ext cx="9122807" cy="323850"/>
           </a:xfrm>
           <a:prstGeom prst="rect">
             <a:avLst/>
@@ -3545,13 +3545,13 @@
           <a:p>
             <a:pPr algn="l"/>
             <a:r>
-              <a:rPr sz="1350" i="0" b="0">
+              <a:rPr sz="2250" i="0" b="0">
                 <a:solidFill>
                   <a:srgbClr val="FFFFFF"/>
                 </a:solidFill>
-                <a:latin typeface="HK Grotesk"/>
-                <a:ea typeface="HK Grotesk"/>
-                <a:cs typeface="HK Grotesk"/>
+                <a:latin typeface="Space Grotesk"/>
+                <a:ea typeface="Space Grotesk"/>
+                <a:cs typeface="Space Grotesk"/>
               </a:rPr>
               <a:t>Chef’s kitchen with a quartz waterfall island</a:t>
             </a:r>
@@ -3566,8 +3566,8 @@
         </p:nvSpPr>
         <p:spPr>
           <a:xfrm>
-            <a:off x="762000" y="12889111"/>
-            <a:ext cx="754142" cy="230386"/>
+            <a:off x="762000" y="13228290"/>
+            <a:ext cx="1025366" cy="398115"/>
           </a:xfrm>
           <a:prstGeom prst="rect">
             <a:avLst/>
@@ -3584,13 +3584,13 @@
               </a:lnSpc>
             </a:pPr>
             <a:r>
-              <a:rPr sz="1650" i="0" b="1">
+              <a:rPr sz="2850" i="0" b="1">
                 <a:solidFill>
                   <a:srgbClr val="2D5BE3"/>
                 </a:solidFill>
-                <a:latin typeface="HK Grotesk"/>
-                <a:ea typeface="HK Grotesk"/>
-                <a:cs typeface="HK Grotesk"/>
+                <a:latin typeface="Space Grotesk"/>
+                <a:ea typeface="Space Grotesk"/>
+                <a:cs typeface="Space Grotesk"/>
               </a:rPr>
               <a:t>02</a:t>
             </a:r>
@@ -3605,8 +3605,8 @@
         </p:nvSpPr>
         <p:spPr>
           <a:xfrm>
-            <a:off x="1166664" y="12889111"/>
-            <a:ext cx="4893945" cy="200025"/>
+            <a:off x="1336179" y="13228290"/>
+            <a:ext cx="7902416" cy="323850"/>
           </a:xfrm>
           <a:prstGeom prst="rect">
             <a:avLst/>
@@ -3619,13 +3619,13 @@
           <a:p>
             <a:pPr algn="l"/>
             <a:r>
-              <a:rPr sz="1350" i="0" b="0">
+              <a:rPr sz="2250" i="0" b="0">
                 <a:solidFill>
                   <a:srgbClr val="FFFFFF"/>
                 </a:solidFill>
-                <a:latin typeface="HK Grotesk"/>
-                <a:ea typeface="HK Grotesk"/>
-                <a:cs typeface="HK Grotesk"/>
+                <a:latin typeface="Space Grotesk"/>
+                <a:ea typeface="Space Grotesk"/>
+                <a:cs typeface="Space Grotesk"/>
               </a:rPr>
               <a:t>Floor-to-ceiling glazing, skyline views</a:t>
             </a:r>
@@ -3640,8 +3640,8 @@
         </p:nvSpPr>
         <p:spPr>
           <a:xfrm>
-            <a:off x="762000" y="13433822"/>
-            <a:ext cx="754142" cy="230386"/>
+            <a:off x="762000" y="14055030"/>
+            <a:ext cx="1025366" cy="398115"/>
           </a:xfrm>
           <a:prstGeom prst="rect">
             <a:avLst/>
@@ -3658,13 +3658,13 @@
               </a:lnSpc>
             </a:pPr>
             <a:r>
-              <a:rPr sz="1650" i="0" b="1">
+              <a:rPr sz="2850" i="0" b="1">
                 <a:solidFill>
                   <a:srgbClr val="2D5BE3"/>
                 </a:solidFill>
-                <a:latin typeface="HK Grotesk"/>
-                <a:ea typeface="HK Grotesk"/>
-                <a:cs typeface="HK Grotesk"/>
+                <a:latin typeface="Space Grotesk"/>
+                <a:ea typeface="Space Grotesk"/>
+                <a:cs typeface="Space Grotesk"/>
               </a:rPr>
               <a:t>03</a:t>
             </a:r>
@@ -3679,8 +3679,8 @@
         </p:nvSpPr>
         <p:spPr>
           <a:xfrm>
-            <a:off x="1166664" y="13433822"/>
-            <a:ext cx="4635103" cy="200025"/>
+            <a:off x="1336179" y="14055030"/>
+            <a:ext cx="7471172" cy="323850"/>
           </a:xfrm>
           <a:prstGeom prst="rect">
             <a:avLst/>
@@ -3693,13 +3693,13 @@
           <a:p>
             <a:pPr algn="l"/>
             <a:r>
-              <a:rPr sz="1350" i="0" b="0">
+              <a:rPr sz="2250" i="0" b="0">
                 <a:solidFill>
                   <a:srgbClr val="FFFFFF"/>
                 </a:solidFill>
-                <a:latin typeface="HK Grotesk"/>
-                <a:ea typeface="HK Grotesk"/>
-                <a:cs typeface="HK Grotesk"/>
+                <a:latin typeface="Space Grotesk"/>
+                <a:ea typeface="Space Grotesk"/>
+                <a:cs typeface="Space Grotesk"/>
               </a:rPr>
               <a:t>Private balcony and skyline terrace</a:t>
             </a:r>
@@ -3714,8 +3714,8 @@
         </p:nvSpPr>
         <p:spPr>
           <a:xfrm>
-            <a:off x="1238250" y="15978188"/>
-            <a:ext cx="1994773" cy="161925"/>
+            <a:off x="1314450" y="15825788"/>
+            <a:ext cx="2855595" cy="257175"/>
           </a:xfrm>
           <a:prstGeom prst="rect">
             <a:avLst/>
@@ -3728,13 +3728,13 @@
           <a:p>
             <a:pPr algn="l"/>
             <a:r>
-              <a:rPr sz="1125" i="0" b="1" spc="22">
+              <a:rPr sz="1725" i="0" b="1" spc="34">
                 <a:solidFill>
                   <a:srgbClr val="FFFFFF"/>
                 </a:solidFill>
-                <a:latin typeface="HK Grotesk"/>
-                <a:ea typeface="HK Grotesk"/>
-                <a:cs typeface="HK Grotesk"/>
+                <a:latin typeface="Space Grotesk"/>
+                <a:ea typeface="Space Grotesk"/>
+                <a:cs typeface="Space Grotesk"/>
               </a:rPr>
               <a:t>See all photos</a:t>
             </a:r>
@@ -3749,8 +3749,8 @@
         </p:nvSpPr>
         <p:spPr>
           <a:xfrm>
-            <a:off x="9105900" y="15954375"/>
-            <a:ext cx="609600" cy="209550"/>
+            <a:off x="9001125" y="15821025"/>
+            <a:ext cx="685800" cy="266700"/>
           </a:xfrm>
           <a:prstGeom prst="rect">
             <a:avLst/>
@@ -3763,13 +3763,13 @@
           <a:p>
             <a:pPr algn="l"/>
             <a:r>
-              <a:rPr sz="1350" i="0" b="0">
+              <a:rPr sz="1800" i="0" b="0">
                 <a:solidFill>
                   <a:srgbClr val="2D5BE3"/>
                 </a:solidFill>
-                <a:latin typeface="HK Grotesk"/>
-                <a:ea typeface="HK Grotesk"/>
-                <a:cs typeface="HK Grotesk"/>
+                <a:latin typeface="Space Grotesk"/>
+                <a:ea typeface="Space Grotesk"/>
+                <a:cs typeface="Space Grotesk"/>
               </a:rPr>
               <a:t>↗</a:t>
             </a:r>
@@ -3784,8 +3784,8 @@
         </p:nvSpPr>
         <p:spPr>
           <a:xfrm>
-            <a:off x="2557031" y="17297400"/>
-            <a:ext cx="5172789" cy="123825"/>
+            <a:off x="1468041" y="17249775"/>
+            <a:ext cx="7350919" cy="180975"/>
           </a:xfrm>
           <a:prstGeom prst="rect">
             <a:avLst/>
@@ -3798,7 +3798,7 @@
           <a:p>
             <a:pPr algn="ctr"/>
             <a:r>
-              <a:rPr sz="825" i="0" b="0" spc="264">
+              <a:rPr sz="1200" i="0" b="0" spc="384">
                 <a:solidFill>
                   <a:srgbClr val="B8B9BA"/>
                 </a:solidFill>

--- a/metro/metro-s07-listing-highlight.pptx
+++ b/metro/metro-s07-listing-highlight.pptx
@@ -3140,7 +3140,7 @@
         </p:nvSpPr>
         <p:spPr>
           <a:xfrm>
-            <a:off x="762000" y="13009215"/>
+            <a:off x="762000" y="13068300"/>
             <a:ext cx="8763000" cy="9525"/>
           </a:xfrm>
           <a:prstGeom prst="rect">
@@ -3184,7 +3184,7 @@
         </p:nvSpPr>
         <p:spPr>
           <a:xfrm>
-            <a:off x="762000" y="13835955"/>
+            <a:off x="762000" y="13954125"/>
             <a:ext cx="8763000" cy="9525"/>
           </a:xfrm>
           <a:prstGeom prst="rect">
@@ -3228,7 +3228,7 @@
         </p:nvSpPr>
         <p:spPr>
           <a:xfrm>
-            <a:off x="762000" y="14662696"/>
+            <a:off x="762000" y="14839950"/>
             <a:ext cx="8763000" cy="9525"/>
           </a:xfrm>
           <a:prstGeom prst="rect">
@@ -3272,7 +3272,7 @@
         </p:nvSpPr>
         <p:spPr>
           <a:xfrm>
-            <a:off x="762000" y="15525750"/>
+            <a:off x="762000" y="15478125"/>
             <a:ext cx="8763000" cy="9525"/>
           </a:xfrm>
           <a:prstGeom prst="rect">
@@ -3360,8 +3360,8 @@
         </p:nvSpPr>
         <p:spPr>
           <a:xfrm>
-            <a:off x="762000" y="15525750"/>
-            <a:ext cx="9525" cy="857250"/>
+            <a:off x="762000" y="15478125"/>
+            <a:ext cx="9525" cy="904875"/>
           </a:xfrm>
           <a:prstGeom prst="rect">
             <a:avLst/>
@@ -3404,8 +3404,8 @@
         </p:nvSpPr>
         <p:spPr>
           <a:xfrm>
-            <a:off x="9515475" y="15525750"/>
-            <a:ext cx="9525" cy="857250"/>
+            <a:off x="9515475" y="15478125"/>
+            <a:ext cx="9525" cy="904875"/>
           </a:xfrm>
           <a:prstGeom prst="rect">
             <a:avLst/>
@@ -3448,7 +3448,7 @@
         </p:nvSpPr>
         <p:spPr>
           <a:xfrm>
-            <a:off x="1081566" y="15907229"/>
+            <a:off x="1081566" y="15883417"/>
             <a:ext cx="94293" cy="94292"/>
           </a:xfrm>
           <a:prstGeom prst="rect">
@@ -3492,8 +3492,8 @@
         </p:nvSpPr>
         <p:spPr>
           <a:xfrm>
-            <a:off x="762000" y="12401550"/>
-            <a:ext cx="1025366" cy="398115"/>
+            <a:off x="762000" y="12420600"/>
+            <a:ext cx="1059180" cy="419100"/>
           </a:xfrm>
           <a:prstGeom prst="rect">
             <a:avLst/>
@@ -3510,7 +3510,7 @@
               </a:lnSpc>
             </a:pPr>
             <a:r>
-              <a:rPr sz="2850" i="0" b="1">
+              <a:rPr sz="3000" i="0" b="1">
                 <a:solidFill>
                   <a:srgbClr val="2D5BE3"/>
                 </a:solidFill>
@@ -3531,8 +3531,8 @@
         </p:nvSpPr>
         <p:spPr>
           <a:xfrm>
-            <a:off x="1336179" y="12401550"/>
-            <a:ext cx="9122807" cy="323850"/>
+            <a:off x="1357312" y="12420600"/>
+            <a:ext cx="10579894" cy="381000"/>
           </a:xfrm>
           <a:prstGeom prst="rect">
             <a:avLst/>
@@ -3545,7 +3545,7 @@
           <a:p>
             <a:pPr algn="l"/>
             <a:r>
-              <a:rPr sz="2250" i="0" b="0">
+              <a:rPr sz="2625" i="0" b="0">
                 <a:solidFill>
                   <a:srgbClr val="FFFFFF"/>
                 </a:solidFill>
@@ -3566,8 +3566,8 @@
         </p:nvSpPr>
         <p:spPr>
           <a:xfrm>
-            <a:off x="762000" y="13228290"/>
-            <a:ext cx="1025366" cy="398115"/>
+            <a:off x="762000" y="13306425"/>
+            <a:ext cx="1059180" cy="419100"/>
           </a:xfrm>
           <a:prstGeom prst="rect">
             <a:avLst/>
@@ -3584,7 +3584,7 @@
               </a:lnSpc>
             </a:pPr>
             <a:r>
-              <a:rPr sz="2850" i="0" b="1">
+              <a:rPr sz="3000" i="0" b="1">
                 <a:solidFill>
                   <a:srgbClr val="2D5BE3"/>
                 </a:solidFill>
@@ -3605,8 +3605,8 @@
         </p:nvSpPr>
         <p:spPr>
           <a:xfrm>
-            <a:off x="1336179" y="13228290"/>
-            <a:ext cx="7902416" cy="323850"/>
+            <a:off x="1357312" y="13306425"/>
+            <a:ext cx="9155906" cy="381000"/>
           </a:xfrm>
           <a:prstGeom prst="rect">
             <a:avLst/>
@@ -3619,7 +3619,7 @@
           <a:p>
             <a:pPr algn="l"/>
             <a:r>
-              <a:rPr sz="2250" i="0" b="0">
+              <a:rPr sz="2625" i="0" b="0">
                 <a:solidFill>
                   <a:srgbClr val="FFFFFF"/>
                 </a:solidFill>
@@ -3640,8 +3640,8 @@
         </p:nvSpPr>
         <p:spPr>
           <a:xfrm>
-            <a:off x="762000" y="14055030"/>
-            <a:ext cx="1025366" cy="398115"/>
+            <a:off x="762000" y="14192250"/>
+            <a:ext cx="1059180" cy="419100"/>
           </a:xfrm>
           <a:prstGeom prst="rect">
             <a:avLst/>
@@ -3658,7 +3658,7 @@
               </a:lnSpc>
             </a:pPr>
             <a:r>
-              <a:rPr sz="2850" i="0" b="1">
+              <a:rPr sz="3000" i="0" b="1">
                 <a:solidFill>
                   <a:srgbClr val="2D5BE3"/>
                 </a:solidFill>
@@ -3679,8 +3679,8 @@
         </p:nvSpPr>
         <p:spPr>
           <a:xfrm>
-            <a:off x="1336179" y="14055030"/>
-            <a:ext cx="7471172" cy="323850"/>
+            <a:off x="1357312" y="14192250"/>
+            <a:ext cx="8652986" cy="381000"/>
           </a:xfrm>
           <a:prstGeom prst="rect">
             <a:avLst/>
@@ -3693,7 +3693,7 @@
           <a:p>
             <a:pPr algn="l"/>
             <a:r>
-              <a:rPr sz="2250" i="0" b="0">
+              <a:rPr sz="2625" i="0" b="0">
                 <a:solidFill>
                   <a:srgbClr val="FFFFFF"/>
                 </a:solidFill>
@@ -3714,8 +3714,8 @@
         </p:nvSpPr>
         <p:spPr>
           <a:xfrm>
-            <a:off x="1314450" y="15825788"/>
-            <a:ext cx="2855595" cy="257175"/>
+            <a:off x="1314450" y="15782925"/>
+            <a:ext cx="3285887" cy="295275"/>
           </a:xfrm>
           <a:prstGeom prst="rect">
             <a:avLst/>
@@ -3728,7 +3728,7 @@
           <a:p>
             <a:pPr algn="l"/>
             <a:r>
-              <a:rPr sz="1725" i="0" b="1" spc="34">
+              <a:rPr sz="2025" i="0" b="1" spc="40">
                 <a:solidFill>
                   <a:srgbClr val="FFFFFF"/>
                 </a:solidFill>
@@ -3749,8 +3749,8 @@
         </p:nvSpPr>
         <p:spPr>
           <a:xfrm>
-            <a:off x="9001125" y="15821025"/>
-            <a:ext cx="685800" cy="266700"/>
+            <a:off x="8972550" y="15773400"/>
+            <a:ext cx="731520" cy="314325"/>
           </a:xfrm>
           <a:prstGeom prst="rect">
             <a:avLst/>
@@ -3763,7 +3763,7 @@
           <a:p>
             <a:pPr algn="l"/>
             <a:r>
-              <a:rPr sz="1800" i="0" b="0">
+              <a:rPr sz="2100" i="0" b="0">
                 <a:solidFill>
                   <a:srgbClr val="2D5BE3"/>
                 </a:solidFill>
@@ -3784,8 +3784,8 @@
         </p:nvSpPr>
         <p:spPr>
           <a:xfrm>
-            <a:off x="1468041" y="17249775"/>
-            <a:ext cx="7350919" cy="180975"/>
+            <a:off x="814626" y="17221200"/>
+            <a:ext cx="8657749" cy="209550"/>
           </a:xfrm>
           <a:prstGeom prst="rect">
             <a:avLst/>
@@ -3798,7 +3798,7 @@
           <a:p>
             <a:pPr algn="ctr"/>
             <a:r>
-              <a:rPr sz="1200" i="0" b="0" spc="384">
+              <a:rPr sz="1425" i="0" b="0" spc="456">
                 <a:solidFill>
                   <a:srgbClr val="B8B9BA"/>
                 </a:solidFill>
